--- a/Presentazione_Nuovo_Sito_v5.pptx
+++ b/Presentazione_Nuovo_Sito_v5.pptx
@@ -9966,7 +9966,7 @@
               </a:defRPr>
             </a:pPr>
             <a:r>
-              <a:t>Implementato su tutti e 5 i siti: la segreteria configura la pubblicazione online in autonomia.</a:t>
+              <a:t>La segreteria configura il metodo di pubblicazione online in totale autonomia, senza toccare file di configurazione.</a:t>
             </a:r>
           </a:p>
         </p:txBody>
